--- a/Topic_C/Exam_Practice/TC-L03_Writing_Workshop_Climate_Seasons_Weather.pptx
+++ b/Topic_C/Exam_Practice/TC-L03_Writing_Workshop_Climate_Seasons_Weather.pptx
@@ -784,7 +784,11 @@
           <a:lstStyle/>
           <a:p>
             <a:r>
-              <a:rPr lang="en-US" dirty="0"/>
+              <a:rPr lang="ar-SA" dirty="0">
+                <a:latin typeface="Amiri" pitchFamily="2" charset="-78"/>
+                <a:ea typeface="Amiri" pitchFamily="2" charset="-78"/>
+                <a:cs typeface="Amiri" pitchFamily="2" charset="-78"/>
+              </a:rPr>
               <a:t>Q3 (3 min to choose and read). Title (أ) suits Core and Develop; title (ب) suits Stretch.</a:t>
             </a:r>
             <a:endParaRPr lang="en-US" dirty="0"/>
@@ -1403,7 +1407,11 @@
           <a:lstStyle/>
           <a:p>
             <a:r>
-              <a:rPr lang="en-US" dirty="0"/>
+              <a:rPr lang="ar-SA" dirty="0">
+                <a:latin typeface="Amiri" pitchFamily="2" charset="-78"/>
+                <a:ea typeface="Amiri" pitchFamily="2" charset="-78"/>
+                <a:cs typeface="Amiri" pitchFamily="2" charset="-78"/>
+              </a:rPr>
               <a:t>WELCOME (1 min) — while students join.
 • Greet each student by name as they arrive: السَّلَامُ عَلَيْكُمْ. Take the register (Pastoral Tracker: attendance 0/1).
 • 2-MINUTE CHECK-IN (SEND training): a private chat to any student who seemed unsettled last lesson — “Are you okay today? 👍 / 👎”.
@@ -1936,7 +1944,11 @@
           <a:lstStyle/>
           <a:p>
             <a:r>
-              <a:rPr lang="en-US" dirty="0"/>
+              <a:rPr lang="ar-SA" dirty="0">
+                <a:latin typeface="Amiri" pitchFamily="2" charset="-78"/>
+                <a:ea typeface="Amiri" pitchFamily="2" charset="-78"/>
+                <a:cs typeface="Amiri" pitchFamily="2" charset="-78"/>
+              </a:rPr>
               <a:t>Question words: أَيْنَ (where) · كَيْفَ (what … like) · مَاذَا حَدَثَ (what happened) · قَارِنْ (compare) · حَسَبَ (according to) — bullet 2 is PAST, bullet 4 is FUTURE.</a:t>
             </a:r>
             <a:endParaRPr lang="en-US" dirty="0"/>
@@ -2508,6 +2520,7 @@
                   <a:srgbClr val="D4AF37"/>
                 </a:solidFill>
                 <a:latin typeface="Amiri" pitchFamily="2" charset="-78"/>
+                <a:ea typeface="Amiri" pitchFamily="2" charset="-78"/>
                 <a:cs typeface="Amiri" pitchFamily="2" charset="-78"/>
               </a:rPr>
               <a:t>م</a:t>
@@ -2714,6 +2727,7 @@
                   <a:srgbClr val="D4AF37"/>
                 </a:solidFill>
                 <a:latin typeface="Amiri" pitchFamily="2" charset="-78"/>
+                <a:ea typeface="Amiri" pitchFamily="2" charset="-78"/>
                 <a:cs typeface="Amiri" pitchFamily="2" charset="-78"/>
               </a:rPr>
               <a:t>وَرْشَةُ الكِتَابَةِ — الطَّقْسُ وَالفُصُولُ</a:t>
@@ -3171,6 +3185,7 @@
                   <a:srgbClr val="D4AF37"/>
                 </a:solidFill>
                 <a:latin typeface="Amiri" pitchFamily="2" charset="-78"/>
+                <a:ea typeface="Amiri" pitchFamily="2" charset="-78"/>
                 <a:cs typeface="Amiri" pitchFamily="2" charset="-78"/>
               </a:rPr>
               <a:t>م</a:t>
@@ -3491,6 +3506,7 @@
                   <a:srgbClr val="8A6D1E"/>
                 </a:solidFill>
                 <a:latin typeface="Amiri" pitchFamily="2" charset="-78"/>
+                <a:ea typeface="Amiri" pitchFamily="2" charset="-78"/>
                 <a:cs typeface="Amiri" pitchFamily="2" charset="-78"/>
               </a:rPr>
               <a:t>نَمُوذَجُ الإِجَابَةِ</a:t>
@@ -3604,6 +3620,7 @@
                   <a:srgbClr val="1F2A37"/>
                 </a:solidFill>
                 <a:latin typeface="Amiri" pitchFamily="2" charset="-78"/>
+                <a:ea typeface="Amiri" pitchFamily="2" charset="-78"/>
                 <a:cs typeface="Amiri" pitchFamily="2" charset="-78"/>
               </a:rPr>
               <a:t>مَرْحَبًا يَا عُمَرُ،</a:t>
@@ -3623,6 +3640,7 @@
                   <a:srgbClr val="1F2A37"/>
                 </a:solidFill>
                 <a:latin typeface="Amiri" pitchFamily="2" charset="-78"/>
+                <a:ea typeface="Amiri" pitchFamily="2" charset="-78"/>
                 <a:cs typeface="Amiri" pitchFamily="2" charset="-78"/>
               </a:rPr>
               <a:t>كَيْفَ حَالُكَ؟ أَنَا الآنَ فِي إِسْطَنْبُولَ مَعَ أُسْرَتِي. الجَوُّ هُنَا مُعْتَدِلٌ وَمُشْمِسٌ، وَدَرَجَةُ الحَرَارَةِ عِشْرُونَ دَرَجَةً. أَمْسِ تَغَيَّرَ الطَّقْسُ فَجْأَةً، وَسَقَطَتْ أَمْطَارٌ غَزِيرَةٌ، فَبَقِينَا فِي المَتْحَفِ سَاعَتَيْنِ. أُحِبُّ هٰذَا الجَوَّ، لِأَنَّهُ أَدْفَأُ مِنْ جَوِّ لَنْدَنَ وَلَيْسَ حَارًّا جِدًّا. حَسَبَ النَّشْرَةِ الجَوِّيَّةِ، سَتُشْرِقُ الشَّمْسُ غَدًا، فَسَنَرْكَبُ قَارِبًا فِي البَحْرِ، وَسَنَأْكُلُ السَّمَكَ.</a:t>
@@ -3642,6 +3660,7 @@
                   <a:srgbClr val="1F2A37"/>
                 </a:solidFill>
                 <a:latin typeface="Amiri" pitchFamily="2" charset="-78"/>
+                <a:ea typeface="Amiri" pitchFamily="2" charset="-78"/>
                 <a:cs typeface="Amiri" pitchFamily="2" charset="-78"/>
               </a:rPr>
               <a:t>إِلَى اللِّقَاءِ،</a:t>
@@ -3661,6 +3680,7 @@
                   <a:srgbClr val="1F2A37"/>
                 </a:solidFill>
                 <a:latin typeface="Amiri" pitchFamily="2" charset="-78"/>
+                <a:ea typeface="Amiri" pitchFamily="2" charset="-78"/>
                 <a:cs typeface="Amiri" pitchFamily="2" charset="-78"/>
               </a:rPr>
               <a:t>يُوسُفُ</a:t>
@@ -3824,11 +3844,12 @@
               <a:buNone/>
             </a:pPr>
             <a:r>
-              <a:rPr lang="en-US" sz="950" b="1" dirty="0">
+              <a:rPr lang="ar-SA" sz="950" b="1" dirty="0">
                 <a:solidFill>
                   <a:srgbClr val="FFFFFF"/>
                 </a:solidFill>
                 <a:latin typeface="Calibri" pitchFamily="34" charset="0"/>
+                <a:ea typeface="Amiri" pitchFamily="2" charset="-78"/>
                 <a:cs typeface="Amiri" pitchFamily="2" charset="-78"/>
               </a:rPr>
               <a:t>الجَوُّ هُنَا مُعْتَدِلٌ</a:t>
@@ -3889,11 +3910,12 @@
               <a:buNone/>
             </a:pPr>
             <a:r>
-              <a:rPr lang="en-US" sz="950" b="1" dirty="0">
+              <a:rPr lang="ar-SA" sz="950" b="1" dirty="0">
                 <a:solidFill>
                   <a:srgbClr val="FFFFFF"/>
                 </a:solidFill>
                 <a:latin typeface="Calibri" pitchFamily="34" charset="0"/>
+                <a:ea typeface="Amiri" pitchFamily="2" charset="-78"/>
                 <a:cs typeface="Amiri" pitchFamily="2" charset="-78"/>
               </a:rPr>
               <a:t>سَقَطَتْ أَمْطَارٌ غَزِيرَةٌ</a:t>
@@ -3954,11 +3976,12 @@
               <a:buNone/>
             </a:pPr>
             <a:r>
-              <a:rPr lang="en-US" sz="950" b="1" dirty="0">
+              <a:rPr lang="ar-SA" sz="950" b="1" dirty="0">
                 <a:solidFill>
                   <a:srgbClr val="FFFFFF"/>
                 </a:solidFill>
                 <a:latin typeface="Calibri" pitchFamily="34" charset="0"/>
+                <a:ea typeface="Amiri" pitchFamily="2" charset="-78"/>
                 <a:cs typeface="Amiri" pitchFamily="2" charset="-78"/>
               </a:rPr>
               <a:t>أَدْفَأُ مِنْ جَوِّ لَنْدَنَ</a:t>
@@ -4019,11 +4042,12 @@
               <a:buNone/>
             </a:pPr>
             <a:r>
-              <a:rPr lang="en-US" sz="950" b="1" dirty="0">
+              <a:rPr lang="ar-SA" sz="950" b="1" dirty="0">
                 <a:solidFill>
                   <a:srgbClr val="FFFFFF"/>
                 </a:solidFill>
                 <a:latin typeface="Calibri" pitchFamily="34" charset="0"/>
+                <a:ea typeface="Amiri" pitchFamily="2" charset="-78"/>
                 <a:cs typeface="Amiri" pitchFamily="2" charset="-78"/>
               </a:rPr>
               <a:t>سَتُشْرِقُ الشَّمْسُ غَدًا</a:t>
@@ -4157,6 +4181,7 @@
                   <a:srgbClr val="D4AF37"/>
                 </a:solidFill>
                 <a:latin typeface="Amiri" pitchFamily="2" charset="-78"/>
+                <a:ea typeface="Amiri" pitchFamily="2" charset="-78"/>
                 <a:cs typeface="Amiri" pitchFamily="2" charset="-78"/>
               </a:rPr>
               <a:t>م</a:t>
@@ -4477,6 +4502,7 @@
                   <a:srgbClr val="8A6D1E"/>
                 </a:solidFill>
                 <a:latin typeface="Amiri" pitchFamily="2" charset="-78"/>
+                <a:ea typeface="Amiri" pitchFamily="2" charset="-78"/>
                 <a:cs typeface="Amiri" pitchFamily="2" charset="-78"/>
               </a:rPr>
               <a:t>نَمُوذَجُ الإِجَابَةِ</a:t>
@@ -4590,6 +4616,7 @@
                   <a:srgbClr val="1F2A37"/>
                 </a:solidFill>
                 <a:latin typeface="Amiri" pitchFamily="2" charset="-78"/>
+                <a:ea typeface="Amiri" pitchFamily="2" charset="-78"/>
                 <a:cs typeface="Amiri" pitchFamily="2" charset="-78"/>
               </a:rPr>
               <a:t>عَزِيزِي عُمَرُ،</a:t>
@@ -4609,6 +4636,7 @@
                   <a:srgbClr val="1F2A37"/>
                 </a:solidFill>
                 <a:latin typeface="Amiri" pitchFamily="2" charset="-78"/>
+                <a:ea typeface="Amiri" pitchFamily="2" charset="-78"/>
                 <a:cs typeface="Amiri" pitchFamily="2" charset="-78"/>
               </a:rPr>
               <a:t>تَحِيَّةً دَافِئَةً مِنْ إِسْطَنْبُولَ! وَصَلْنَا قَبْلَ ثَلَاثَةِ أَيَّامٍ، وَالجَوُّ هُنَا رَبِيعِيٌّ رَائِعٌ: سَمَاءٌ زَرْقَاءُ صَافِيَةٌ، وَنَسِيمٌ لَطِيفٌ يَأْتِي مِنَ البَحْرِ، وَدَرَجَاتُ حَرَارَةٍ لَا تَتَجَاوَزُ اثْنَتَيْنِ وَعِشْرِينَ دَرَجَةً. أَمَّا أَمْسِ فَكَانَ مُخْتَلِفًا تَمَامًا؛ فَبَيْنَمَا كُنَّا نَتَجَوَّلُ فِي السُّوقِ، تَلَبَّدَتِ السَّمَاءُ بِالغُيُومِ، وَسَقَطَتْ أَمْطَارٌ غَزِيرَةٌ، فَاحْتَمَيْنَا فِي مَقْهًى قَدِيمٍ، وَشَرِبْنَا الشَّايَ التُّرْكِيَّ السَّاخِنَ حَتَّى تَوَقَّفَ المَطَرُ. فِي رَأْيِي، هٰذَا الجَوُّ أَفْضَلُ مِنْ صَيْفِ الخَلِيجِ الحَارِّ وَمِنْ شِتَاءِ لَنْدَنَ الرَّمَادِيِّ. وَمِنَ المُتَوَقَّعِ أَنْ يَكُونَ الغَدُ مُشْمِسًا، فَسَنَقُومُ بِجَوْلَةٍ فِي البُوسْفُورِ.</a:t>
@@ -4628,6 +4656,7 @@
                   <a:srgbClr val="1F2A37"/>
                 </a:solidFill>
                 <a:latin typeface="Amiri" pitchFamily="2" charset="-78"/>
+                <a:ea typeface="Amiri" pitchFamily="2" charset="-78"/>
                 <a:cs typeface="Amiri" pitchFamily="2" charset="-78"/>
               </a:rPr>
               <a:t>مَعَ أَطْيَبِ التَّحِيَّاتِ،</a:t>
@@ -4647,6 +4676,7 @@
                   <a:srgbClr val="1F2A37"/>
                 </a:solidFill>
                 <a:latin typeface="Amiri" pitchFamily="2" charset="-78"/>
+                <a:ea typeface="Amiri" pitchFamily="2" charset="-78"/>
                 <a:cs typeface="Amiri" pitchFamily="2" charset="-78"/>
               </a:rPr>
               <a:t>يُوسُفُ</a:t>
@@ -4810,11 +4840,12 @@
               <a:buNone/>
             </a:pPr>
             <a:r>
-              <a:rPr lang="en-US" sz="950" b="1" dirty="0">
+              <a:rPr lang="ar-SA" sz="950" b="1" dirty="0">
                 <a:solidFill>
                   <a:srgbClr val="FFFFFF"/>
                 </a:solidFill>
                 <a:latin typeface="Calibri" pitchFamily="34" charset="0"/>
+                <a:ea typeface="Amiri" pitchFamily="2" charset="-78"/>
                 <a:cs typeface="Amiri" pitchFamily="2" charset="-78"/>
               </a:rPr>
               <a:t>لَا تَتَجَاوَزُ اثْنَتَيْنِ وَعِشْرِينَ</a:t>
@@ -4875,11 +4906,12 @@
               <a:buNone/>
             </a:pPr>
             <a:r>
-              <a:rPr lang="en-US" sz="950" b="1" dirty="0">
+              <a:rPr lang="ar-SA" sz="950" b="1" dirty="0">
                 <a:solidFill>
                   <a:srgbClr val="FFFFFF"/>
                 </a:solidFill>
                 <a:latin typeface="Calibri" pitchFamily="34" charset="0"/>
+                <a:ea typeface="Amiri" pitchFamily="2" charset="-78"/>
                 <a:cs typeface="Amiri" pitchFamily="2" charset="-78"/>
               </a:rPr>
               <a:t>بَيْنَمَا كُنَّا نَتَجَوَّلُ</a:t>
@@ -4940,11 +4972,12 @@
               <a:buNone/>
             </a:pPr>
             <a:r>
-              <a:rPr lang="en-US" sz="950" b="1" dirty="0">
+              <a:rPr lang="ar-SA" sz="950" b="1" dirty="0">
                 <a:solidFill>
                   <a:srgbClr val="FFFFFF"/>
                 </a:solidFill>
                 <a:latin typeface="Calibri" pitchFamily="34" charset="0"/>
+                <a:ea typeface="Amiri" pitchFamily="2" charset="-78"/>
                 <a:cs typeface="Amiri" pitchFamily="2" charset="-78"/>
               </a:rPr>
               <a:t>أَفْضَلُ مِنْ صَيْفِ الخَلِيجِ</a:t>
@@ -5005,11 +5038,12 @@
               <a:buNone/>
             </a:pPr>
             <a:r>
-              <a:rPr lang="en-US" sz="950" b="1" dirty="0">
+              <a:rPr lang="ar-SA" sz="950" b="1" dirty="0">
                 <a:solidFill>
                   <a:srgbClr val="FFFFFF"/>
                 </a:solidFill>
                 <a:latin typeface="Calibri" pitchFamily="34" charset="0"/>
+                <a:ea typeface="Amiri" pitchFamily="2" charset="-78"/>
                 <a:cs typeface="Amiri" pitchFamily="2" charset="-78"/>
               </a:rPr>
               <a:t>مِنَ المُتَوَقَّعِ أَنْ يَكُونَ</a:t>
@@ -5143,6 +5177,7 @@
                   <a:srgbClr val="D4AF37"/>
                 </a:solidFill>
                 <a:latin typeface="Amiri" pitchFamily="2" charset="-78"/>
+                <a:ea typeface="Amiri" pitchFamily="2" charset="-78"/>
                 <a:cs typeface="Amiri" pitchFamily="2" charset="-78"/>
               </a:rPr>
               <a:t>م</a:t>
@@ -5463,6 +5498,7 @@
                   <a:srgbClr val="8A6D1E"/>
                 </a:solidFill>
                 <a:latin typeface="Amiri" pitchFamily="2" charset="-78"/>
+                <a:ea typeface="Amiri" pitchFamily="2" charset="-78"/>
                 <a:cs typeface="Amiri" pitchFamily="2" charset="-78"/>
               </a:rPr>
               <a:t>اخْتَرْ عُنْوَانًا وَاحِدًا</a:t>
@@ -5743,6 +5779,7 @@
                   <a:srgbClr val="1B3B6F"/>
                 </a:solidFill>
                 <a:latin typeface="Amiri" pitchFamily="2" charset="-78"/>
+                <a:ea typeface="Amiri" pitchFamily="2" charset="-78"/>
                 <a:cs typeface="Amiri" pitchFamily="2" charset="-78"/>
               </a:rPr>
               <a:t>الفُصُولُ وَالطَّقْسُ فِي حَيَاتِي</a:t>
@@ -5781,6 +5818,7 @@
                   <a:srgbClr val="1B3B6F"/>
                 </a:solidFill>
                 <a:latin typeface="Amiri" pitchFamily="2" charset="-78"/>
+                <a:ea typeface="Amiri" pitchFamily="2" charset="-78"/>
                 <a:cs typeface="Amiri" pitchFamily="2" charset="-78"/>
               </a:rPr>
               <a:t>(أ)</a:t>
@@ -5887,6 +5925,7 @@
                   <a:srgbClr val="1B3B6F"/>
                 </a:solidFill>
                 <a:latin typeface="Amiri" pitchFamily="2" charset="-78"/>
+                <a:ea typeface="Amiri" pitchFamily="2" charset="-78"/>
                 <a:cs typeface="Amiri" pitchFamily="2" charset="-78"/>
               </a:rPr>
               <a:t>الطَّقْسُ فِي بَلَدِكَ · فَصْلُكَ المُفَضَّلُ وَلِمَاذَا · رِحْلَةٌ إِلَى بَلَدٍ مُنَاخُهُ مُخْتَلِفٌ · رَأْيُكَ وَخِطَطُكَ</a:t>
@@ -6018,6 +6057,7 @@
                   <a:srgbClr val="1B3B6F"/>
                 </a:solidFill>
                 <a:latin typeface="Amiri" pitchFamily="2" charset="-78"/>
+                <a:ea typeface="Amiri" pitchFamily="2" charset="-78"/>
                 <a:cs typeface="Amiri" pitchFamily="2" charset="-78"/>
               </a:rPr>
               <a:t>تَغَيُّرُ المُنَاخِ: هَلْ نَشْعُرُ بِهِ؟</a:t>
@@ -6056,6 +6096,7 @@
                   <a:srgbClr val="1B3B6F"/>
                 </a:solidFill>
                 <a:latin typeface="Amiri" pitchFamily="2" charset="-78"/>
+                <a:ea typeface="Amiri" pitchFamily="2" charset="-78"/>
                 <a:cs typeface="Amiri" pitchFamily="2" charset="-78"/>
               </a:rPr>
               <a:t>(ب)</a:t>
@@ -6159,6 +6200,7 @@
                   <a:srgbClr val="1B3B6F"/>
                 </a:solidFill>
                 <a:latin typeface="Amiri" pitchFamily="2" charset="-78"/>
+                <a:ea typeface="Amiri" pitchFamily="2" charset="-78"/>
                 <a:cs typeface="Amiri" pitchFamily="2" charset="-78"/>
               </a:rPr>
               <a:t>مَا الَّذِي تَغَيَّرَ؟ · المَاضِي وَالحَاضِرُ · حَدَثٌ عِشْتَهُ · رَأْيُكَ وَالمُسْتَقْبَلُ</a:t>
@@ -6358,6 +6400,7 @@
                   <a:srgbClr val="D4AF37"/>
                 </a:solidFill>
                 <a:latin typeface="Amiri" pitchFamily="2" charset="-78"/>
+                <a:ea typeface="Amiri" pitchFamily="2" charset="-78"/>
                 <a:cs typeface="Amiri" pitchFamily="2" charset="-78"/>
               </a:rPr>
               <a:t>م</a:t>
@@ -6678,6 +6721,7 @@
                   <a:srgbClr val="8A6D1E"/>
                 </a:solidFill>
                 <a:latin typeface="Amiri" pitchFamily="2" charset="-78"/>
+                <a:ea typeface="Amiri" pitchFamily="2" charset="-78"/>
                 <a:cs typeface="Amiri" pitchFamily="2" charset="-78"/>
               </a:rPr>
               <a:t>خُطَّةُ الكِتَابَةِ</a:t>
@@ -7302,6 +7346,7 @@
                   <a:srgbClr val="1B3B6F"/>
                 </a:solidFill>
                 <a:latin typeface="Amiri" pitchFamily="2" charset="-78"/>
+                <a:ea typeface="Amiri" pitchFamily="2" charset="-78"/>
                 <a:cs typeface="Amiri" pitchFamily="2" charset="-78"/>
               </a:rPr>
               <a:t>قَدْ تُشْرِقُ الشَّمْسُ فِي الصَّبَاحِ، ثُمَّ تَسْقُطُ الأَمْطَارُ.</a:t>
@@ -7401,6 +7446,7 @@
                   <a:srgbClr val="1B3B6F"/>
                 </a:solidFill>
                 <a:latin typeface="Amiri" pitchFamily="2" charset="-78"/>
+                <a:ea typeface="Amiri" pitchFamily="2" charset="-78"/>
                 <a:cs typeface="Amiri" pitchFamily="2" charset="-78"/>
               </a:rPr>
               <a:t>كَانَ الجَوُّ حَارًّا جِدًّا، وَكُنَّا نَخْرُجُ فِي المَسَاءِ.</a:t>
@@ -7500,6 +7546,7 @@
                   <a:srgbClr val="1B3B6F"/>
                 </a:solidFill>
                 <a:latin typeface="Amiri" pitchFamily="2" charset="-78"/>
+                <a:ea typeface="Amiri" pitchFamily="2" charset="-78"/>
                 <a:cs typeface="Amiri" pitchFamily="2" charset="-78"/>
               </a:rPr>
               <a:t>سَأَزُورُ كَنَدَا، لِأَنِّي أُرِيدُ أَنْ أَرَى الثُّلُوجَ.</a:t>
@@ -7661,6 +7708,7 @@
                   <a:srgbClr val="1F2A37"/>
                 </a:solidFill>
                 <a:latin typeface="Amiri" pitchFamily="2" charset="-78"/>
+                <a:ea typeface="Amiri" pitchFamily="2" charset="-78"/>
                 <a:cs typeface="Amiri" pitchFamily="2" charset="-78"/>
               </a:rPr>
               <a:t>أ</a:t>
@@ -7687,6 +7735,7 @@
                   <a:srgbClr val="1F2A37"/>
                 </a:solidFill>
                 <a:latin typeface="Amiri" pitchFamily="2" charset="-78"/>
+                <a:ea typeface="Amiri" pitchFamily="2" charset="-78"/>
                 <a:cs typeface="Amiri" pitchFamily="2" charset="-78"/>
               </a:rPr>
               <a:t>ب</a:t>
@@ -7833,6 +7882,7 @@
                   <a:srgbClr val="D4AF37"/>
                 </a:solidFill>
                 <a:latin typeface="Amiri" pitchFamily="2" charset="-78"/>
+                <a:ea typeface="Amiri" pitchFamily="2" charset="-78"/>
                 <a:cs typeface="Amiri" pitchFamily="2" charset="-78"/>
               </a:rPr>
               <a:t>م</a:t>
@@ -8090,6 +8140,7 @@
                   <a:srgbClr val="8A6D1E"/>
                 </a:solidFill>
                 <a:latin typeface="Amiri" pitchFamily="2" charset="-78"/>
+                <a:ea typeface="Amiri" pitchFamily="2" charset="-78"/>
                 <a:cs typeface="Amiri" pitchFamily="2" charset="-78"/>
               </a:rPr>
               <a:t>أ</a:t>
@@ -8154,6 +8205,7 @@
                   <a:srgbClr val="1B3B6F"/>
                 </a:solidFill>
                 <a:latin typeface="Amiri" pitchFamily="2" charset="-78"/>
+                <a:ea typeface="Amiri" pitchFamily="2" charset="-78"/>
                 <a:cs typeface="Amiri" pitchFamily="2" charset="-78"/>
               </a:rPr>
               <a:t>أ</a:t>
@@ -8205,6 +8257,7 @@
                   <a:srgbClr val="8A6D1E"/>
                 </a:solidFill>
                 <a:latin typeface="Amiri" pitchFamily="2" charset="-78"/>
+                <a:ea typeface="Amiri" pitchFamily="2" charset="-78"/>
                 <a:cs typeface="Amiri" pitchFamily="2" charset="-78"/>
               </a:rPr>
               <a:t>نَمُوذَجُ الإِجَابَةِ</a:t>
@@ -8318,6 +8371,7 @@
                   <a:srgbClr val="1F2A37"/>
                 </a:solidFill>
                 <a:latin typeface="Amiri" pitchFamily="2" charset="-78"/>
+                <a:ea typeface="Amiri" pitchFamily="2" charset="-78"/>
                 <a:cs typeface="Amiri" pitchFamily="2" charset="-78"/>
               </a:rPr>
               <a:t>فِي بَرِيطَانْيَا أَرْبَعَةُ فُصُولٍ، لٰكِنَّ الطَّقْسَ يَتَغَيَّرُ كَثِيرًا. فِي يَوْمٍ وَاحِدٍ، قَدْ تُشْرِقُ الشَّمْسُ فِي الصَّبَاحِ، ثُمَّ تَسْقُطُ الأَمْطَارُ فِي المَسَاءِ. لِذٰلِكَ آخُذُ مِظَلَّةً مَعِي دَائِمًا.</a:t>
@@ -8337,6 +8391,7 @@
                   <a:srgbClr val="1F2A37"/>
                 </a:solidFill>
                 <a:latin typeface="Amiri" pitchFamily="2" charset="-78"/>
+                <a:ea typeface="Amiri" pitchFamily="2" charset="-78"/>
                 <a:cs typeface="Amiri" pitchFamily="2" charset="-78"/>
               </a:rPr>
               <a:t>فَصْلِيَ المُفَضَّلُ هُوَ الصَّيْفُ. فِي الصَّيْفِ الجَوُّ دَافِئٌ، وَالأَيَّامُ طَوِيلَةٌ وَمُشْمِسَةٌ. أَلْعَبُ كُرَةَ القَدَمِ فِي الحَدِيقَةِ مَعَ أَصْدِقَائِي، وَنَأْكُلُ المُثَلَّجَاتِ. لَا أُحِبُّ الشِّتَاءَ، لِأَنَّهُ بَارِدٌ وَمُظْلِمٌ، وَتَغْرُبُ الشَّمْسُ فِيهِ قَبْلَ السَّاعَةِ الخَامِسَةِ.</a:t>
@@ -8356,6 +8411,7 @@
                   <a:srgbClr val="1F2A37"/>
                 </a:solidFill>
                 <a:latin typeface="Amiri" pitchFamily="2" charset="-78"/>
+                <a:ea typeface="Amiri" pitchFamily="2" charset="-78"/>
                 <a:cs typeface="Amiri" pitchFamily="2" charset="-78"/>
               </a:rPr>
               <a:t>فِي العُطْلَةِ المَاضِيَةِ سَافَرْتُ إِلَى مِصْرَ لِزِيَارَةِ جَدَّتِي. كَانَ الجَوُّ حَارًّا جِدًّا، وَكَانَتْ دَرَجَةُ الحَرَارَةِ أَرْبَعِينَ دَرَجَةً. كُنَّا نَخْرُجُ فِي المَسَاءِ فَقَطْ، لِأَنَّ الشَّمْسَ قَوِيَّةٌ فِي النَّهَارِ.</a:t>
@@ -8375,6 +8431,7 @@
                   <a:srgbClr val="1F2A37"/>
                 </a:solidFill>
                 <a:latin typeface="Amiri" pitchFamily="2" charset="-78"/>
+                <a:ea typeface="Amiri" pitchFamily="2" charset="-78"/>
                 <a:cs typeface="Amiri" pitchFamily="2" charset="-78"/>
               </a:rPr>
               <a:t>فِي رَأْيِي، جَوُّ مِصْرَ أَحَرُّ مِنْ جَوِّ بَرِيطَانْيَا، لٰكِنَّهُ أَجْمَلُ فِي الشِّتَاءِ. فِي المُسْتَقْبَلِ سَأَزُورُ كَنَدَا، لِأَنِّي أُرِيدُ أَنْ أَرَى الثُّلُوجَ الكَثِيرَةَ، وَسَأَتَعَلَّمُ التَّزَلُّجَ هُنَاكَ.</a:t>
@@ -8538,11 +8595,12 @@
               <a:buNone/>
             </a:pPr>
             <a:r>
-              <a:rPr lang="en-US" sz="950" b="1" dirty="0">
+              <a:rPr lang="ar-SA" sz="950" b="1" dirty="0">
                 <a:solidFill>
                   <a:srgbClr val="FFFFFF"/>
                 </a:solidFill>
                 <a:latin typeface="Calibri" pitchFamily="34" charset="0"/>
+                <a:ea typeface="Amiri" pitchFamily="2" charset="-78"/>
                 <a:cs typeface="Amiri" pitchFamily="2" charset="-78"/>
               </a:rPr>
               <a:t>قَدْ تُشْرِقُ الشَّمْسُ</a:t>
@@ -8603,11 +8661,12 @@
               <a:buNone/>
             </a:pPr>
             <a:r>
-              <a:rPr lang="en-US" sz="950" b="1" dirty="0">
+              <a:rPr lang="ar-SA" sz="950" b="1" dirty="0">
                 <a:solidFill>
                   <a:srgbClr val="FFFFFF"/>
                 </a:solidFill>
                 <a:latin typeface="Calibri" pitchFamily="34" charset="0"/>
+                <a:ea typeface="Amiri" pitchFamily="2" charset="-78"/>
                 <a:cs typeface="Amiri" pitchFamily="2" charset="-78"/>
               </a:rPr>
               <a:t>الأَيَّامُ طَوِيلَةٌ وَمُشْمِسَةٌ</a:t>
@@ -8668,11 +8727,12 @@
               <a:buNone/>
             </a:pPr>
             <a:r>
-              <a:rPr lang="en-US" sz="950" b="1" dirty="0">
+              <a:rPr lang="ar-SA" sz="950" b="1" dirty="0">
                 <a:solidFill>
                   <a:srgbClr val="FFFFFF"/>
                 </a:solidFill>
                 <a:latin typeface="Calibri" pitchFamily="34" charset="0"/>
+                <a:ea typeface="Amiri" pitchFamily="2" charset="-78"/>
                 <a:cs typeface="Amiri" pitchFamily="2" charset="-78"/>
               </a:rPr>
               <a:t>كَانَ الجَوُّ حَارًّا</a:t>
@@ -8733,11 +8793,12 @@
               <a:buNone/>
             </a:pPr>
             <a:r>
-              <a:rPr lang="en-US" sz="950" b="1" dirty="0">
+              <a:rPr lang="ar-SA" sz="950" b="1" dirty="0">
                 <a:solidFill>
                   <a:srgbClr val="FFFFFF"/>
                 </a:solidFill>
                 <a:latin typeface="Calibri" pitchFamily="34" charset="0"/>
+                <a:ea typeface="Amiri" pitchFamily="2" charset="-78"/>
                 <a:cs typeface="Amiri" pitchFamily="2" charset="-78"/>
               </a:rPr>
               <a:t>أَحَرُّ مِنْ جَوِّ بَرِيطَانْيَا</a:t>
@@ -8871,6 +8932,7 @@
                   <a:srgbClr val="D4AF37"/>
                 </a:solidFill>
                 <a:latin typeface="Amiri" pitchFamily="2" charset="-78"/>
+                <a:ea typeface="Amiri" pitchFamily="2" charset="-78"/>
                 <a:cs typeface="Amiri" pitchFamily="2" charset="-78"/>
               </a:rPr>
               <a:t>م</a:t>
@@ -9128,6 +9190,7 @@
                   <a:srgbClr val="8A6D1E"/>
                 </a:solidFill>
                 <a:latin typeface="Amiri" pitchFamily="2" charset="-78"/>
+                <a:ea typeface="Amiri" pitchFamily="2" charset="-78"/>
                 <a:cs typeface="Amiri" pitchFamily="2" charset="-78"/>
               </a:rPr>
               <a:t>أ</a:t>
@@ -9192,6 +9255,7 @@
                   <a:srgbClr val="1B3B6F"/>
                 </a:solidFill>
                 <a:latin typeface="Amiri" pitchFamily="2" charset="-78"/>
+                <a:ea typeface="Amiri" pitchFamily="2" charset="-78"/>
                 <a:cs typeface="Amiri" pitchFamily="2" charset="-78"/>
               </a:rPr>
               <a:t>أ</a:t>
@@ -9243,6 +9307,7 @@
                   <a:srgbClr val="8A6D1E"/>
                 </a:solidFill>
                 <a:latin typeface="Amiri" pitchFamily="2" charset="-78"/>
+                <a:ea typeface="Amiri" pitchFamily="2" charset="-78"/>
                 <a:cs typeface="Amiri" pitchFamily="2" charset="-78"/>
               </a:rPr>
               <a:t>نَمُوذَجُ الإِجَابَةِ</a:t>
@@ -9356,6 +9421,7 @@
                   <a:srgbClr val="1F2A37"/>
                 </a:solidFill>
                 <a:latin typeface="Amiri" pitchFamily="2" charset="-78"/>
+                <a:ea typeface="Amiri" pitchFamily="2" charset="-78"/>
                 <a:cs typeface="Amiri" pitchFamily="2" charset="-78"/>
               </a:rPr>
               <a:t>يَقُولُ البَرِيطَانِيُّونَ مَازِحِينَ إِنَّ بِلَادَهُمْ تَعِيشُ الفُصُولَ الأَرْبَعَةَ فِي يَوْمٍ وَاحِدٍ، وَهُمْ عَلَى حَقٍّ! فَالشَّمْسُ تُشْرِقُ فِي الصَّبَاحِ، ثُمَّ تَهُبُّ رِيَاحٌ بَارِدَةٌ، وَقَبْلَ المَسَاءِ تَسْقُطُ الأَمْطَارُ، وَلِهٰذَا لَا يَخْرُجُ أَحَدٌ دُونَ مِظَلَّةٍ.</a:t>
@@ -9375,6 +9441,7 @@
                   <a:srgbClr val="1F2A37"/>
                 </a:solidFill>
                 <a:latin typeface="Amiri" pitchFamily="2" charset="-78"/>
+                <a:ea typeface="Amiri" pitchFamily="2" charset="-78"/>
                 <a:cs typeface="Amiri" pitchFamily="2" charset="-78"/>
               </a:rPr>
               <a:t>أَمَّا فَصْلِيَ المُفَضَّلُ فَهُوَ الخَرِيفُ؛ إِذْ تَتَحَوَّلُ أَوْرَاقُ الأَشْجَارِ إِلَى أَلْوَانٍ ذَهَبِيَّةٍ وَحَمْرَاءَ، وَيُصْبِحُ الجَوُّ مُنْعِشًا، لَا حَارًّا كَالصَّيْفِ وَلَا قَاسِيًا كَالشِّتَاءِ. وَأَجْمَلُ مَا فِيهِ المَشْيُ فِي الحَدِيقَةِ وَصَوْتُ الأَوْرَاقِ اليَابِسَةِ تَحْتَ قَدَمَيَّ.</a:t>
@@ -9394,6 +9461,7 @@
                   <a:srgbClr val="1F2A37"/>
                 </a:solidFill>
                 <a:latin typeface="Amiri" pitchFamily="2" charset="-78"/>
+                <a:ea typeface="Amiri" pitchFamily="2" charset="-78"/>
                 <a:cs typeface="Amiri" pitchFamily="2" charset="-78"/>
               </a:rPr>
               <a:t>وَقَدْ عِشْتُ تَجْرِبَةً مُخْتَلِفَةً تَمَامًا فِي الصَّيْفِ المَاضِي، عِنْدَمَا زُرْتُ أَقَارِبِي فِي الرِّيَاضِ؛ فَقَدْ وَصَلَتْ دَرَجَةُ الحَرَارَةِ إِلَى سِتٍّ وَأَرْبَعِينَ دَرَجَةً، وَكَانَتِ الشَّوَارِعُ شِبْهَ فَارِغَةٍ فِي النَّهَارِ، بَيْنَمَا تَمْتَلِئُ المَقَاهِي وَالحَدَائِقُ بِالعَائِلَاتِ بَعْدَ مُنْتَصَفِ اللَّيْلِ.</a:t>
@@ -9413,6 +9481,7 @@
                   <a:srgbClr val="1F2A37"/>
                 </a:solidFill>
                 <a:latin typeface="Amiri" pitchFamily="2" charset="-78"/>
+                <a:ea typeface="Amiri" pitchFamily="2" charset="-78"/>
                 <a:cs typeface="Amiri" pitchFamily="2" charset="-78"/>
               </a:rPr>
               <a:t>صَحِيحٌ أَنَّ المُنَاخَ يُؤَثِّرُ فِي طَرِيقَةِ حَيَاتِنَا، غَيْرَ أَنَّ الإِنْسَانَ قَادِرٌ عَلَى التَّكَيُّفِ مَعَ أَيِّ طَقْسٍ. وَلَوْ خُيِّرْتُ بَيْنَ حَرِّ الرِّيَاضِ وَمَطَرِ لَنْدَنَ، لَاخْتَرْتُ المَطَرَ، لِأَنِّي أَعْشَقُ رَائِحَةَ الأَرْضِ بَعْدَهُ.</a:t>
@@ -9511,11 +9580,12 @@
               <a:buNone/>
             </a:pPr>
             <a:r>
-              <a:rPr lang="en-US" sz="950" b="1" dirty="0">
+              <a:rPr lang="ar-SA" sz="950" b="1" dirty="0">
                 <a:solidFill>
                   <a:srgbClr val="FFFFFF"/>
                 </a:solidFill>
                 <a:latin typeface="Calibri" pitchFamily="34" charset="0"/>
+                <a:ea typeface="Amiri" pitchFamily="2" charset="-78"/>
                 <a:cs typeface="Amiri" pitchFamily="2" charset="-78"/>
               </a:rPr>
               <a:t>يَقُولُ … إِنَّ</a:t>
@@ -9576,11 +9646,12 @@
               <a:buNone/>
             </a:pPr>
             <a:r>
-              <a:rPr lang="en-US" sz="950" b="1" dirty="0">
+              <a:rPr lang="ar-SA" sz="950" b="1" dirty="0">
                 <a:solidFill>
                   <a:srgbClr val="FFFFFF"/>
                 </a:solidFill>
                 <a:latin typeface="Calibri" pitchFamily="34" charset="0"/>
+                <a:ea typeface="Amiri" pitchFamily="2" charset="-78"/>
                 <a:cs typeface="Amiri" pitchFamily="2" charset="-78"/>
               </a:rPr>
               <a:t>لَا حَارًّا كَالصَّيْفِ وَلَا قَاسِيًا</a:t>
@@ -9641,11 +9712,12 @@
               <a:buNone/>
             </a:pPr>
             <a:r>
-              <a:rPr lang="en-US" sz="950" b="1" dirty="0">
+              <a:rPr lang="ar-SA" sz="950" b="1" dirty="0">
                 <a:solidFill>
                   <a:srgbClr val="FFFFFF"/>
                 </a:solidFill>
                 <a:latin typeface="Calibri" pitchFamily="34" charset="0"/>
+                <a:ea typeface="Amiri" pitchFamily="2" charset="-78"/>
                 <a:cs typeface="Amiri" pitchFamily="2" charset="-78"/>
               </a:rPr>
               <a:t>بَيْنَمَا تَمْتَلِئُ</a:t>
@@ -9706,11 +9778,12 @@
               <a:buNone/>
             </a:pPr>
             <a:r>
-              <a:rPr lang="en-US" sz="950" b="1" dirty="0">
+              <a:rPr lang="ar-SA" sz="950" b="1" dirty="0">
                 <a:solidFill>
                   <a:srgbClr val="FFFFFF"/>
                 </a:solidFill>
                 <a:latin typeface="Calibri" pitchFamily="34" charset="0"/>
+                <a:ea typeface="Amiri" pitchFamily="2" charset="-78"/>
                 <a:cs typeface="Amiri" pitchFamily="2" charset="-78"/>
               </a:rPr>
               <a:t>لَوْ خُيِّرْتُ … لَاخْتَرْتُ</a:t>
@@ -9844,6 +9917,7 @@
                   <a:srgbClr val="D4AF37"/>
                 </a:solidFill>
                 <a:latin typeface="Amiri" pitchFamily="2" charset="-78"/>
+                <a:ea typeface="Amiri" pitchFamily="2" charset="-78"/>
                 <a:cs typeface="Amiri" pitchFamily="2" charset="-78"/>
               </a:rPr>
               <a:t>م</a:t>
@@ -10101,6 +10175,7 @@
                   <a:srgbClr val="8A6D1E"/>
                 </a:solidFill>
                 <a:latin typeface="Amiri" pitchFamily="2" charset="-78"/>
+                <a:ea typeface="Amiri" pitchFamily="2" charset="-78"/>
                 <a:cs typeface="Amiri" pitchFamily="2" charset="-78"/>
               </a:rPr>
               <a:t>ب</a:t>
@@ -10165,6 +10240,7 @@
                   <a:srgbClr val="1B3B6F"/>
                 </a:solidFill>
                 <a:latin typeface="Amiri" pitchFamily="2" charset="-78"/>
+                <a:ea typeface="Amiri" pitchFamily="2" charset="-78"/>
                 <a:cs typeface="Amiri" pitchFamily="2" charset="-78"/>
               </a:rPr>
               <a:t>ب</a:t>
@@ -10216,6 +10292,7 @@
                   <a:srgbClr val="8A6D1E"/>
                 </a:solidFill>
                 <a:latin typeface="Amiri" pitchFamily="2" charset="-78"/>
+                <a:ea typeface="Amiri" pitchFamily="2" charset="-78"/>
                 <a:cs typeface="Amiri" pitchFamily="2" charset="-78"/>
               </a:rPr>
               <a:t>نَمُوذَجُ الإِجَابَةِ</a:t>
@@ -10329,6 +10406,7 @@
                   <a:srgbClr val="1F2A37"/>
                 </a:solidFill>
                 <a:latin typeface="Amiri" pitchFamily="2" charset="-78"/>
+                <a:ea typeface="Amiri" pitchFamily="2" charset="-78"/>
                 <a:cs typeface="Amiri" pitchFamily="2" charset="-78"/>
               </a:rPr>
               <a:t>لَمْ يَعُدْ تَغَيُّرُ المُنَاخِ مَوْضُوعًا نَقْرَأُ عَنْهُ فِي الكُتُبِ فَقَطْ، بَلْ أَصْبَحَ وَاقِعًا نَعِيشُهُ؛ فَالصَّيْفُ يَزْدَادُ حَرَارَةً سَنَةً بَعْدَ سَنَةٍ، وَالعَوَاصِفُ أَصْبَحَتْ أَقْوَى وَأَكْثَرَ تَكْرَارًا مِنْ قَبْلُ.</a:t>
@@ -10348,6 +10426,7 @@
                   <a:srgbClr val="1F2A37"/>
                 </a:solidFill>
                 <a:latin typeface="Amiri" pitchFamily="2" charset="-78"/>
+                <a:ea typeface="Amiri" pitchFamily="2" charset="-78"/>
                 <a:cs typeface="Amiri" pitchFamily="2" charset="-78"/>
               </a:rPr>
               <a:t>تَقُولُ جَدَّتِي إِنَّ الثُّلُوجَ كَانَتْ تُغَطِّي قَرْيَتَهَا فِي لُبْنَانَ ثَلَاثَةَ أَشْهُرٍ كُلَّ شِتَاءٍ، أَمَّا الآنَ فَلَا تَبْقَى أَكْثَرَ مِنْ أُسْبُوعٍ أَوْ أُسْبُوعَيْنِ، مِمَّا يُقَلِّلُ مِيَاهَ الأَنْهَارِ فِي الصَّيْفِ وَيُضِرُّ بِالمَزَارِعِ.</a:t>
@@ -10367,6 +10446,7 @@
                   <a:srgbClr val="1F2A37"/>
                 </a:solidFill>
                 <a:latin typeface="Amiri" pitchFamily="2" charset="-78"/>
+                <a:ea typeface="Amiri" pitchFamily="2" charset="-78"/>
                 <a:cs typeface="Amiri" pitchFamily="2" charset="-78"/>
               </a:rPr>
               <a:t>وَفِي الشِّتَاءِ المَاضِي رَأَيْتُ أَثَرَ هٰذَا التَّغَيُّرِ بِعَيْنَيَّ؛ فَقَدْ فَاضَ النَّهْرُ القَرِيبُ مِنْ مَدِينَتِنَا بَعْدَ أَمْطَارٍ لَمْ تَتَوَقَّفْ أُسْبُوعًا كَامِلًا، فَأُغْلِقَتِ الطُّرُقُ، وَاضْطُرَّتْ عَائِلَاتٌ كَثِيرَةٌ إِلَى تَرْكِ بُيُوتِهَا، وَتَطَوَّعَ طُلَّابُ مَدْرَسَتِنَا لِجَمْعِ البَطَّانِيَّاتِ وَالطَّعَامِ لِلْمُتَضَرِّرِينَ.</a:t>
@@ -10386,6 +10466,7 @@
                   <a:srgbClr val="1F2A37"/>
                 </a:solidFill>
                 <a:latin typeface="Amiri" pitchFamily="2" charset="-78"/>
+                <a:ea typeface="Amiri" pitchFamily="2" charset="-78"/>
                 <a:cs typeface="Amiri" pitchFamily="2" charset="-78"/>
               </a:rPr>
               <a:t>صَحِيحٌ أَنَّ الطَّقْسَ تَغَيَّرَ دَائِمًا عَبْرَ التَّارِيخِ، غَيْرَ أَنَّ العُلَمَاءَ يُؤَكِّدُونَ أَنَّ سُرْعَةَ التَّغَيُّرِ اليَوْمَ سَبَبُهَا الإِنْسَانُ. وَإِذَا اسْتَمَرَّتْ دَرَجَاتُ الحَرَارَةِ فِي الارْتِفَاعِ، فَسَتُعَانِي الأَجْيَالُ القَادِمَةُ أَكْثَرَ مِنَّا بِكَثِيرٍ؛ وَلِذٰلِكَ يَجِبُ أَنْ نَتَحَرَّكَ الآنَ، أَفْرَادًا وَحُكُومَاتٍ، لَا غَدًا.</a:t>
@@ -10484,11 +10565,12 @@
               <a:buNone/>
             </a:pPr>
             <a:r>
-              <a:rPr lang="en-US" sz="950" b="1" dirty="0">
+              <a:rPr lang="ar-SA" sz="950" b="1" dirty="0">
                 <a:solidFill>
                   <a:srgbClr val="FFFFFF"/>
                 </a:solidFill>
                 <a:latin typeface="Calibri" pitchFamily="34" charset="0"/>
+                <a:ea typeface="Amiri" pitchFamily="2" charset="-78"/>
                 <a:cs typeface="Amiri" pitchFamily="2" charset="-78"/>
               </a:rPr>
               <a:t>لَمْ يَعُدْ … بَلْ أَصْبَحَ</a:t>
@@ -10549,11 +10631,12 @@
               <a:buNone/>
             </a:pPr>
             <a:r>
-              <a:rPr lang="en-US" sz="950" b="1" dirty="0">
+              <a:rPr lang="ar-SA" sz="950" b="1" dirty="0">
                 <a:solidFill>
                   <a:srgbClr val="FFFFFF"/>
                 </a:solidFill>
                 <a:latin typeface="Calibri" pitchFamily="34" charset="0"/>
+                <a:ea typeface="Amiri" pitchFamily="2" charset="-78"/>
                 <a:cs typeface="Amiri" pitchFamily="2" charset="-78"/>
               </a:rPr>
               <a:t>أَمَّا الآنَ فَلَا تَبْقَى</a:t>
@@ -10614,11 +10697,12 @@
               <a:buNone/>
             </a:pPr>
             <a:r>
-              <a:rPr lang="en-US" sz="950" b="1" dirty="0">
+              <a:rPr lang="ar-SA" sz="950" b="1" dirty="0">
                 <a:solidFill>
                   <a:srgbClr val="FFFFFF"/>
                 </a:solidFill>
                 <a:latin typeface="Calibri" pitchFamily="34" charset="0"/>
+                <a:ea typeface="Amiri" pitchFamily="2" charset="-78"/>
                 <a:cs typeface="Amiri" pitchFamily="2" charset="-78"/>
               </a:rPr>
               <a:t>مِمَّا يُقَلِّلُ</a:t>
@@ -10679,11 +10763,12 @@
               <a:buNone/>
             </a:pPr>
             <a:r>
-              <a:rPr lang="en-US" sz="950" b="1" dirty="0">
+              <a:rPr lang="ar-SA" sz="950" b="1" dirty="0">
                 <a:solidFill>
                   <a:srgbClr val="FFFFFF"/>
                 </a:solidFill>
                 <a:latin typeface="Calibri" pitchFamily="34" charset="0"/>
+                <a:ea typeface="Amiri" pitchFamily="2" charset="-78"/>
                 <a:cs typeface="Amiri" pitchFamily="2" charset="-78"/>
               </a:rPr>
               <a:t>إِذَا اسْتَمَرَّتْ … فَسَتُعَانِي</a:t>
@@ -10817,6 +10902,7 @@
                   <a:srgbClr val="D4AF37"/>
                 </a:solidFill>
                 <a:latin typeface="Amiri" pitchFamily="2" charset="-78"/>
+                <a:ea typeface="Amiri" pitchFamily="2" charset="-78"/>
                 <a:cs typeface="Amiri" pitchFamily="2" charset="-78"/>
               </a:rPr>
               <a:t>م</a:t>
@@ -11137,6 +11223,7 @@
                   <a:srgbClr val="8A6D1E"/>
                 </a:solidFill>
                 <a:latin typeface="Amiri" pitchFamily="2" charset="-78"/>
+                <a:ea typeface="Amiri" pitchFamily="2" charset="-78"/>
                 <a:cs typeface="Amiri" pitchFamily="2" charset="-78"/>
               </a:rPr>
               <a:t>قَيِّمْ عَمَلَكَ</a:t>
@@ -12381,6 +12468,7 @@
                   <a:srgbClr val="FFFFFF"/>
                 </a:solidFill>
                 <a:latin typeface="Amiri" pitchFamily="2" charset="-78"/>
+                <a:ea typeface="Amiri" pitchFamily="2" charset="-78"/>
                 <a:cs typeface="Amiri" pitchFamily="2" charset="-78"/>
               </a:rPr>
               <a:t>أَحْسَنْتُمْ! إِلَى اللِّقَاءِ</a:t>
@@ -12533,6 +12621,7 @@
                   <a:srgbClr val="D4AF37"/>
                 </a:solidFill>
                 <a:latin typeface="Amiri" pitchFamily="2" charset="-78"/>
+                <a:ea typeface="Amiri" pitchFamily="2" charset="-78"/>
                 <a:cs typeface="Amiri" pitchFamily="2" charset="-78"/>
               </a:rPr>
               <a:t>وَرْشَةُ التَّدْرِيبِ</a:t>
@@ -12666,6 +12755,7 @@
                   <a:srgbClr val="D4AF37"/>
                 </a:solidFill>
                 <a:latin typeface="Amiri" pitchFamily="2" charset="-78"/>
+                <a:ea typeface="Amiri" pitchFamily="2" charset="-78"/>
                 <a:cs typeface="Amiri" pitchFamily="2" charset="-78"/>
               </a:rPr>
               <a:t>م</a:t>
@@ -12986,6 +13076,7 @@
                   <a:srgbClr val="8A6D1E"/>
                 </a:solidFill>
                 <a:latin typeface="Amiri" pitchFamily="2" charset="-78"/>
+                <a:ea typeface="Amiri" pitchFamily="2" charset="-78"/>
                 <a:cs typeface="Amiri" pitchFamily="2" charset="-78"/>
               </a:rPr>
               <a:t>آدَابُ الصَّفِّ</a:t>
@@ -14517,6 +14608,7 @@
                   <a:srgbClr val="D4AF37"/>
                 </a:solidFill>
                 <a:latin typeface="Amiri" pitchFamily="2" charset="-78"/>
+                <a:ea typeface="Amiri" pitchFamily="2" charset="-78"/>
                 <a:cs typeface="Amiri" pitchFamily="2" charset="-78"/>
               </a:rPr>
               <a:t>م</a:t>
@@ -14837,6 +14929,7 @@
                   <a:srgbClr val="8A6D1E"/>
                 </a:solidFill>
                 <a:latin typeface="Amiri" pitchFamily="2" charset="-78"/>
+                <a:ea typeface="Amiri" pitchFamily="2" charset="-78"/>
                 <a:cs typeface="Amiri" pitchFamily="2" charset="-78"/>
               </a:rPr>
               <a:t>خَرِيطَةُ الوَرْشَةِ</a:t>
@@ -15151,6 +15244,7 @@
                   <a:srgbClr val="1B3B6F"/>
                 </a:solidFill>
                 <a:latin typeface="Amiri" pitchFamily="2" charset="-78"/>
+                <a:ea typeface="Amiri" pitchFamily="2" charset="-78"/>
                 <a:cs typeface="Amiri" pitchFamily="2" charset="-78"/>
               </a:rPr>
               <a:t>كَيْفَ</a:t>
@@ -15427,6 +15521,7 @@
                   <a:srgbClr val="1E6B52"/>
                 </a:solidFill>
                 <a:latin typeface="Amiri" pitchFamily="2" charset="-78"/>
+                <a:ea typeface="Amiri" pitchFamily="2" charset="-78"/>
                 <a:cs typeface="Amiri" pitchFamily="2" charset="-78"/>
               </a:rPr>
               <a:t>الاسْتِمَارَةُ</a:t>
@@ -15703,6 +15798,7 @@
                   <a:srgbClr val="1E6B52"/>
                 </a:solidFill>
                 <a:latin typeface="Amiri" pitchFamily="2" charset="-78"/>
+                <a:ea typeface="Amiri" pitchFamily="2" charset="-78"/>
                 <a:cs typeface="Amiri" pitchFamily="2" charset="-78"/>
               </a:rPr>
               <a:t>الرِّسَالَةُ</a:t>
@@ -15979,6 +16075,7 @@
                   <a:srgbClr val="1E6B52"/>
                 </a:solidFill>
                 <a:latin typeface="Amiri" pitchFamily="2" charset="-78"/>
+                <a:ea typeface="Amiri" pitchFamily="2" charset="-78"/>
                 <a:cs typeface="Amiri" pitchFamily="2" charset="-78"/>
               </a:rPr>
               <a:t>المَقَالُ</a:t>
@@ -16255,6 +16352,7 @@
                   <a:srgbClr val="8A6D1E"/>
                 </a:solidFill>
                 <a:latin typeface="Amiri" pitchFamily="2" charset="-78"/>
+                <a:ea typeface="Amiri" pitchFamily="2" charset="-78"/>
                 <a:cs typeface="Amiri" pitchFamily="2" charset="-78"/>
               </a:rPr>
               <a:t>قَيِّمْ</a:t>
@@ -16498,6 +16596,7 @@
                   <a:srgbClr val="D4AF37"/>
                 </a:solidFill>
                 <a:latin typeface="Amiri" pitchFamily="2" charset="-78"/>
+                <a:ea typeface="Amiri" pitchFamily="2" charset="-78"/>
                 <a:cs typeface="Amiri" pitchFamily="2" charset="-78"/>
               </a:rPr>
               <a:t>م</a:t>
@@ -16818,6 +16917,7 @@
                   <a:srgbClr val="8A6D1E"/>
                 </a:solidFill>
                 <a:latin typeface="Amiri" pitchFamily="2" charset="-78"/>
+                <a:ea typeface="Amiri" pitchFamily="2" charset="-78"/>
                 <a:cs typeface="Amiri" pitchFamily="2" charset="-78"/>
               </a:rPr>
               <a:t>امْتِحَانُ الكِتَابَةِ</a:t>
@@ -17442,6 +17542,7 @@
                   <a:srgbClr val="1B3B6F"/>
                 </a:solidFill>
                 <a:latin typeface="Amiri" pitchFamily="2" charset="-78"/>
+                <a:ea typeface="Amiri" pitchFamily="2" charset="-78"/>
                 <a:cs typeface="Amiri" pitchFamily="2" charset="-78"/>
               </a:rPr>
               <a:t>سَقَطَتْ أَمْطَارٌ غَزِيرَةٌ</a:t>
@@ -17541,6 +17642,7 @@
                   <a:srgbClr val="1B3B6F"/>
                 </a:solidFill>
                 <a:latin typeface="Amiri" pitchFamily="2" charset="-78"/>
+                <a:ea typeface="Amiri" pitchFamily="2" charset="-78"/>
                 <a:cs typeface="Amiri" pitchFamily="2" charset="-78"/>
               </a:rPr>
               <a:t>هٰذَا الجَوُّ أَدْفَأُ مِنْ جَوِّ لَنْدَنَ</a:t>
@@ -17640,6 +17742,7 @@
                   <a:srgbClr val="1B3B6F"/>
                 </a:solidFill>
                 <a:latin typeface="Amiri" pitchFamily="2" charset="-78"/>
+                <a:ea typeface="Amiri" pitchFamily="2" charset="-78"/>
                 <a:cs typeface="Amiri" pitchFamily="2" charset="-78"/>
               </a:rPr>
               <a:t>مِنَ المُتَوَقَّعِ أَنْ يَكُونَ الغَدُ مُشْمِسًا</a:t>
@@ -17811,6 +17914,7 @@
                   <a:srgbClr val="D4AF37"/>
                 </a:solidFill>
                 <a:latin typeface="Amiri" pitchFamily="2" charset="-78"/>
+                <a:ea typeface="Amiri" pitchFamily="2" charset="-78"/>
                 <a:cs typeface="Amiri" pitchFamily="2" charset="-78"/>
               </a:rPr>
               <a:t>م</a:t>
@@ -18131,6 +18235,7 @@
                   <a:srgbClr val="8A6D1E"/>
                 </a:solidFill>
                 <a:latin typeface="Amiri" pitchFamily="2" charset="-78"/>
+                <a:ea typeface="Amiri" pitchFamily="2" charset="-78"/>
                 <a:cs typeface="Amiri" pitchFamily="2" charset="-78"/>
               </a:rPr>
               <a:t>اسْتِمَارَةُ الرِّحْلَةِ: الطَّقْسُ وَالمَلَابِسُ</a:t>
@@ -18487,6 +18592,7 @@
                   <a:srgbClr val="1B3B6F"/>
                 </a:solidFill>
                 <a:latin typeface="Amiri" pitchFamily="2" charset="-78"/>
+                <a:ea typeface="Amiri" pitchFamily="2" charset="-78"/>
                 <a:cs typeface="Amiri" pitchFamily="2" charset="-78"/>
               </a:rPr>
               <a:t>الاسْمُ</a:t>
@@ -18731,6 +18837,7 @@
                   <a:srgbClr val="1B3B6F"/>
                 </a:solidFill>
                 <a:latin typeface="Amiri" pitchFamily="2" charset="-78"/>
+                <a:ea typeface="Amiri" pitchFamily="2" charset="-78"/>
                 <a:cs typeface="Amiri" pitchFamily="2" charset="-78"/>
               </a:rPr>
               <a:t>مَكَانُ الرِّحْلَةِ</a:t>
@@ -18975,6 +19082,7 @@
                   <a:srgbClr val="1B3B6F"/>
                 </a:solidFill>
                 <a:latin typeface="Amiri" pitchFamily="2" charset="-78"/>
+                <a:ea typeface="Amiri" pitchFamily="2" charset="-78"/>
                 <a:cs typeface="Amiri" pitchFamily="2" charset="-78"/>
               </a:rPr>
               <a:t>الفَصْلُ</a:t>
@@ -19219,6 +19327,7 @@
                   <a:srgbClr val="1B3B6F"/>
                 </a:solidFill>
                 <a:latin typeface="Amiri" pitchFamily="2" charset="-78"/>
+                <a:ea typeface="Amiri" pitchFamily="2" charset="-78"/>
                 <a:cs typeface="Amiri" pitchFamily="2" charset="-78"/>
               </a:rPr>
               <a:t>الطَّقْسُ المُتَوَقَّعُ</a:t>
@@ -19463,6 +19572,7 @@
                   <a:srgbClr val="1B3B6F"/>
                 </a:solidFill>
                 <a:latin typeface="Amiri" pitchFamily="2" charset="-78"/>
+                <a:ea typeface="Amiri" pitchFamily="2" charset="-78"/>
                 <a:cs typeface="Amiri" pitchFamily="2" charset="-78"/>
               </a:rPr>
               <a:t>دَرَجَةُ الحَرَارَةِ</a:t>
@@ -19707,6 +19817,7 @@
                   <a:srgbClr val="1B3B6F"/>
                 </a:solidFill>
                 <a:latin typeface="Amiri" pitchFamily="2" charset="-78"/>
+                <a:ea typeface="Amiri" pitchFamily="2" charset="-78"/>
                 <a:cs typeface="Amiri" pitchFamily="2" charset="-78"/>
               </a:rPr>
               <a:t>مَلَابِسُ مُنَاسِبَةٌ (اثْنَتَانِ)</a:t>
@@ -19951,6 +20062,7 @@
                   <a:srgbClr val="1B3B6F"/>
                 </a:solidFill>
                 <a:latin typeface="Amiri" pitchFamily="2" charset="-78"/>
+                <a:ea typeface="Amiri" pitchFamily="2" charset="-78"/>
                 <a:cs typeface="Amiri" pitchFamily="2" charset="-78"/>
               </a:rPr>
               <a:t>نَشَاطٌ إِذَا كَانَ الجَوُّ مُشْمِسًا</a:t>
@@ -20130,6 +20242,7 @@
                   <a:srgbClr val="1B3B6F"/>
                 </a:solidFill>
                 <a:latin typeface="Amiri" pitchFamily="2" charset="-78"/>
+                <a:ea typeface="Amiri" pitchFamily="2" charset="-78"/>
                 <a:cs typeface="Amiri" pitchFamily="2" charset="-78"/>
               </a:rPr>
               <a:t>جُمْلَةٌ: مَاذَا سَتَفْعَلُ إِذَا أَمْطَرَتْ؟</a:t>
@@ -20339,6 +20452,7 @@
                   <a:srgbClr val="D4AF37"/>
                 </a:solidFill>
                 <a:latin typeface="Amiri" pitchFamily="2" charset="-78"/>
+                <a:ea typeface="Amiri" pitchFamily="2" charset="-78"/>
                 <a:cs typeface="Amiri" pitchFamily="2" charset="-78"/>
               </a:rPr>
               <a:t>م</a:t>
@@ -20659,6 +20773,7 @@
                   <a:srgbClr val="8A6D1E"/>
                 </a:solidFill>
                 <a:latin typeface="Amiri" pitchFamily="2" charset="-78"/>
+                <a:ea typeface="Amiri" pitchFamily="2" charset="-78"/>
                 <a:cs typeface="Amiri" pitchFamily="2" charset="-78"/>
               </a:rPr>
               <a:t>نَمُوذَجُ الإِجَابَةِ</a:t>
@@ -20977,6 +21092,7 @@
                   <a:srgbClr val="1B3B6F"/>
                 </a:solidFill>
                 <a:latin typeface="Amiri" pitchFamily="2" charset="-78"/>
+                <a:ea typeface="Amiri" pitchFamily="2" charset="-78"/>
                 <a:cs typeface="Amiri" pitchFamily="2" charset="-78"/>
               </a:rPr>
               <a:t>يُوسُفُ أَحْمَدُ</a:t>
@@ -21015,6 +21131,7 @@
                   <a:srgbClr val="1B3B6F"/>
                 </a:solidFill>
                 <a:latin typeface="Amiri" pitchFamily="2" charset="-78"/>
+                <a:ea typeface="Amiri" pitchFamily="2" charset="-78"/>
                 <a:cs typeface="Amiri" pitchFamily="2" charset="-78"/>
               </a:rPr>
               <a:t>الاسْمُ</a:t>
@@ -21156,6 +21273,7 @@
                   <a:srgbClr val="1B3B6F"/>
                 </a:solidFill>
                 <a:latin typeface="Amiri" pitchFamily="2" charset="-78"/>
+                <a:ea typeface="Amiri" pitchFamily="2" charset="-78"/>
                 <a:cs typeface="Amiri" pitchFamily="2" charset="-78"/>
               </a:rPr>
               <a:t>جِبَالُ اسْكُتْلَنْدَا</a:t>
@@ -21194,6 +21312,7 @@
                   <a:srgbClr val="1B3B6F"/>
                 </a:solidFill>
                 <a:latin typeface="Amiri" pitchFamily="2" charset="-78"/>
+                <a:ea typeface="Amiri" pitchFamily="2" charset="-78"/>
                 <a:cs typeface="Amiri" pitchFamily="2" charset="-78"/>
               </a:rPr>
               <a:t>مَكَانُ الرِّحْلَةِ</a:t>
@@ -21335,6 +21454,7 @@
                   <a:srgbClr val="1B3B6F"/>
                 </a:solidFill>
                 <a:latin typeface="Amiri" pitchFamily="2" charset="-78"/>
+                <a:ea typeface="Amiri" pitchFamily="2" charset="-78"/>
                 <a:cs typeface="Amiri" pitchFamily="2" charset="-78"/>
               </a:rPr>
               <a:t>الخَرِيفُ</a:t>
@@ -21373,6 +21493,7 @@
                   <a:srgbClr val="1B3B6F"/>
                 </a:solidFill>
                 <a:latin typeface="Amiri" pitchFamily="2" charset="-78"/>
+                <a:ea typeface="Amiri" pitchFamily="2" charset="-78"/>
                 <a:cs typeface="Amiri" pitchFamily="2" charset="-78"/>
               </a:rPr>
               <a:t>الفَصْلُ</a:t>
@@ -21514,6 +21635,7 @@
                   <a:srgbClr val="1B3B6F"/>
                 </a:solidFill>
                 <a:latin typeface="Amiri" pitchFamily="2" charset="-78"/>
+                <a:ea typeface="Amiri" pitchFamily="2" charset="-78"/>
                 <a:cs typeface="Amiri" pitchFamily="2" charset="-78"/>
               </a:rPr>
               <a:t>بَارِدٌ وَمُمْطِرٌ</a:t>
@@ -21552,6 +21674,7 @@
                   <a:srgbClr val="1B3B6F"/>
                 </a:solidFill>
                 <a:latin typeface="Amiri" pitchFamily="2" charset="-78"/>
+                <a:ea typeface="Amiri" pitchFamily="2" charset="-78"/>
                 <a:cs typeface="Amiri" pitchFamily="2" charset="-78"/>
               </a:rPr>
               <a:t>الطَّقْسُ المُتَوَقَّعُ</a:t>
@@ -21693,6 +21816,7 @@
                   <a:srgbClr val="1B3B6F"/>
                 </a:solidFill>
                 <a:latin typeface="Amiri" pitchFamily="2" charset="-78"/>
+                <a:ea typeface="Amiri" pitchFamily="2" charset="-78"/>
                 <a:cs typeface="Amiri" pitchFamily="2" charset="-78"/>
               </a:rPr>
               <a:t>ثَمَانِي دَرَجَاتٍ</a:t>
@@ -21731,6 +21855,7 @@
                   <a:srgbClr val="1B3B6F"/>
                 </a:solidFill>
                 <a:latin typeface="Amiri" pitchFamily="2" charset="-78"/>
+                <a:ea typeface="Amiri" pitchFamily="2" charset="-78"/>
                 <a:cs typeface="Amiri" pitchFamily="2" charset="-78"/>
               </a:rPr>
               <a:t>دَرَجَةُ الحَرَارَةِ</a:t>
@@ -21872,6 +21997,7 @@
                   <a:srgbClr val="1B3B6F"/>
                 </a:solidFill>
                 <a:latin typeface="Amiri" pitchFamily="2" charset="-78"/>
+                <a:ea typeface="Amiri" pitchFamily="2" charset="-78"/>
                 <a:cs typeface="Amiri" pitchFamily="2" charset="-78"/>
               </a:rPr>
               <a:t>مِعْطَفٌ وَحِذَاءٌ مُضَادٌّ لِلْمَاءِ</a:t>
@@ -21910,6 +22036,7 @@
                   <a:srgbClr val="1B3B6F"/>
                 </a:solidFill>
                 <a:latin typeface="Amiri" pitchFamily="2" charset="-78"/>
+                <a:ea typeface="Amiri" pitchFamily="2" charset="-78"/>
                 <a:cs typeface="Amiri" pitchFamily="2" charset="-78"/>
               </a:rPr>
               <a:t>مَلَابِسُ مُنَاسِبَةٌ (اثْنَتَانِ)</a:t>
@@ -22051,6 +22178,7 @@
                   <a:srgbClr val="1B3B6F"/>
                 </a:solidFill>
                 <a:latin typeface="Amiri" pitchFamily="2" charset="-78"/>
+                <a:ea typeface="Amiri" pitchFamily="2" charset="-78"/>
                 <a:cs typeface="Amiri" pitchFamily="2" charset="-78"/>
               </a:rPr>
               <a:t>تَسَلُّقُ الجَبَلِ</a:t>
@@ -22089,6 +22217,7 @@
                   <a:srgbClr val="1B3B6F"/>
                 </a:solidFill>
                 <a:latin typeface="Amiri" pitchFamily="2" charset="-78"/>
+                <a:ea typeface="Amiri" pitchFamily="2" charset="-78"/>
                 <a:cs typeface="Amiri" pitchFamily="2" charset="-78"/>
               </a:rPr>
               <a:t>نَشَاطٌ إِذَا كَانَ الجَوُّ مُشْمِسًا</a:t>
@@ -22230,6 +22359,7 @@
                   <a:srgbClr val="1B3B6F"/>
                 </a:solidFill>
                 <a:latin typeface="Amiri" pitchFamily="2" charset="-78"/>
+                <a:ea typeface="Amiri" pitchFamily="2" charset="-78"/>
                 <a:cs typeface="Amiri" pitchFamily="2" charset="-78"/>
               </a:rPr>
               <a:t>إِذَا أَمْطَرَتْ، فَسَنَزُورُ المَتْحَفَ لِأَنَّهُ أَدْفَأُ مِنَ الجَبَلِ.</a:t>
@@ -22268,6 +22398,7 @@
                   <a:srgbClr val="1B3B6F"/>
                 </a:solidFill>
                 <a:latin typeface="Amiri" pitchFamily="2" charset="-78"/>
+                <a:ea typeface="Amiri" pitchFamily="2" charset="-78"/>
                 <a:cs typeface="Amiri" pitchFamily="2" charset="-78"/>
               </a:rPr>
               <a:t>جُمْلَةٌ: مَاذَا سَتَفْعَلُ إِذَا أَمْطَرَتْ؟</a:t>
@@ -22477,6 +22608,7 @@
                   <a:srgbClr val="D4AF37"/>
                 </a:solidFill>
                 <a:latin typeface="Amiri" pitchFamily="2" charset="-78"/>
+                <a:ea typeface="Amiri" pitchFamily="2" charset="-78"/>
                 <a:cs typeface="Amiri" pitchFamily="2" charset="-78"/>
               </a:rPr>
               <a:t>م</a:t>
@@ -22797,6 +22929,7 @@
                   <a:srgbClr val="8A6D1E"/>
                 </a:solidFill>
                 <a:latin typeface="Amiri" pitchFamily="2" charset="-78"/>
+                <a:ea typeface="Amiri" pitchFamily="2" charset="-78"/>
                 <a:cs typeface="Amiri" pitchFamily="2" charset="-78"/>
               </a:rPr>
               <a:t>رِسَالَةٌ عَنِ الطَّقْسِ فِي العُطْلَةِ</a:t>
@@ -23272,6 +23405,7 @@
                   <a:srgbClr val="1B3B6F"/>
                 </a:solidFill>
                 <a:latin typeface="Amiri" pitchFamily="2" charset="-78"/>
+                <a:ea typeface="Amiri" pitchFamily="2" charset="-78"/>
                 <a:cs typeface="Amiri" pitchFamily="2" charset="-78"/>
               </a:rPr>
               <a:t>الجَوُّ هُنَا … وَدَرَجَةُ الحَرَارَةِ …</a:t>
@@ -23348,6 +23482,7 @@
                   <a:srgbClr val="1B3B6F"/>
                 </a:solidFill>
                 <a:latin typeface="Amiri" pitchFamily="2" charset="-78"/>
+                <a:ea typeface="Amiri" pitchFamily="2" charset="-78"/>
                 <a:cs typeface="Amiri" pitchFamily="2" charset="-78"/>
               </a:rPr>
               <a:t>أَمْسِ سَقَطَتْ … فَبَقِينَا …</a:t>
@@ -23424,6 +23559,7 @@
                   <a:srgbClr val="1B3B6F"/>
                 </a:solidFill>
                 <a:latin typeface="Amiri" pitchFamily="2" charset="-78"/>
+                <a:ea typeface="Amiri" pitchFamily="2" charset="-78"/>
                 <a:cs typeface="Amiri" pitchFamily="2" charset="-78"/>
               </a:rPr>
               <a:t>هٰذَا الجَوُّ أَدْفَأُ مِنْ …</a:t>
@@ -23500,6 +23636,7 @@
                   <a:srgbClr val="1B3B6F"/>
                 </a:solidFill>
                 <a:latin typeface="Amiri" pitchFamily="2" charset="-78"/>
+                <a:ea typeface="Amiri" pitchFamily="2" charset="-78"/>
                 <a:cs typeface="Amiri" pitchFamily="2" charset="-78"/>
               </a:rPr>
               <a:t>حَسَبَ النَّشْرَةِ الجَوِّيَّةِ، سَتُشْرِقُ … وَسَنَزُورُ …</a:t>
@@ -23671,6 +23808,7 @@
                   <a:srgbClr val="D4AF37"/>
                 </a:solidFill>
                 <a:latin typeface="Amiri" pitchFamily="2" charset="-78"/>
+                <a:ea typeface="Amiri" pitchFamily="2" charset="-78"/>
                 <a:cs typeface="Amiri" pitchFamily="2" charset="-78"/>
               </a:rPr>
               <a:t>م</a:t>
@@ -23991,6 +24129,7 @@
                   <a:srgbClr val="8A6D1E"/>
                 </a:solidFill>
                 <a:latin typeface="Amiri" pitchFamily="2" charset="-78"/>
+                <a:ea typeface="Amiri" pitchFamily="2" charset="-78"/>
                 <a:cs typeface="Amiri" pitchFamily="2" charset="-78"/>
               </a:rPr>
               <a:t>نَصُّ السُّؤَالِ</a:t>
@@ -24271,6 +24410,7 @@
                   <a:srgbClr val="1B3B6F"/>
                 </a:solidFill>
                 <a:latin typeface="Amiri" pitchFamily="2" charset="-78"/>
+                <a:ea typeface="Amiri" pitchFamily="2" charset="-78"/>
                 <a:cs typeface="Amiri" pitchFamily="2" charset="-78"/>
               </a:rPr>
               <a:t>أَنْتَ فِي عُطْلَةٍ خَارِجَ بِلَادِكَ. اكْتُبْ رِسَالَةً إِلَى صَدِيقِكَ (٨٠–٩٠ كَلِمَةً).</a:t>
@@ -24412,6 +24552,7 @@
                   <a:srgbClr val="1B3B6F"/>
                 </a:solidFill>
                 <a:latin typeface="Amiri" pitchFamily="2" charset="-78"/>
+                <a:ea typeface="Amiri" pitchFamily="2" charset="-78"/>
                 <a:cs typeface="Amiri" pitchFamily="2" charset="-78"/>
               </a:rPr>
               <a:t>أَيْنَ أَنْتَ؟ وَكَيْفَ الطَّقْسُ؟</a:t>
@@ -24553,6 +24694,7 @@
                   <a:srgbClr val="1B3B6F"/>
                 </a:solidFill>
                 <a:latin typeface="Amiri" pitchFamily="2" charset="-78"/>
+                <a:ea typeface="Amiri" pitchFamily="2" charset="-78"/>
                 <a:cs typeface="Amiri" pitchFamily="2" charset="-78"/>
               </a:rPr>
               <a:t>مَاذَا حَدَثَ أَمْسِ بِسَبَبِ الطَّقْسِ؟</a:t>
@@ -24694,6 +24836,7 @@
                   <a:srgbClr val="1B3B6F"/>
                 </a:solidFill>
                 <a:latin typeface="Amiri" pitchFamily="2" charset="-78"/>
+                <a:ea typeface="Amiri" pitchFamily="2" charset="-78"/>
                 <a:cs typeface="Amiri" pitchFamily="2" charset="-78"/>
               </a:rPr>
               <a:t>قَارِنْ بَيْنَ الطَّقْسِ هُنَاكَ وَالطَّقْسِ فِي بَلَدِكَ.</a:t>
@@ -24835,6 +24978,7 @@
                   <a:srgbClr val="1B3B6F"/>
                 </a:solidFill>
                 <a:latin typeface="Amiri" pitchFamily="2" charset="-78"/>
+                <a:ea typeface="Amiri" pitchFamily="2" charset="-78"/>
                 <a:cs typeface="Amiri" pitchFamily="2" charset="-78"/>
               </a:rPr>
               <a:t>مَاذَا سَتَفْعَلُ غَدًا حَسَبَ النَّشْرَةِ الجَوِّيَّةِ؟</a:t>
@@ -25044,6 +25188,7 @@
                   <a:srgbClr val="D4AF37"/>
                 </a:solidFill>
                 <a:latin typeface="Amiri" pitchFamily="2" charset="-78"/>
+                <a:ea typeface="Amiri" pitchFamily="2" charset="-78"/>
                 <a:cs typeface="Amiri" pitchFamily="2" charset="-78"/>
               </a:rPr>
               <a:t>م</a:t>
@@ -25364,6 +25509,7 @@
                   <a:srgbClr val="8A6D1E"/>
                 </a:solidFill>
                 <a:latin typeface="Amiri" pitchFamily="2" charset="-78"/>
+                <a:ea typeface="Amiri" pitchFamily="2" charset="-78"/>
                 <a:cs typeface="Amiri" pitchFamily="2" charset="-78"/>
               </a:rPr>
               <a:t>قَوَالِبُ الكِتَابَةِ</a:t>
@@ -25644,6 +25790,7 @@
                   <a:srgbClr val="1B3B6F"/>
                 </a:solidFill>
                 <a:latin typeface="Amiri" pitchFamily="2" charset="-78"/>
+                <a:ea typeface="Amiri" pitchFamily="2" charset="-78"/>
                 <a:cs typeface="Amiri" pitchFamily="2" charset="-78"/>
               </a:rPr>
               <a:t>مَرْحَبًا يَا ______ ، كَيْفَ حَالُكَ؟</a:t>
@@ -25850,6 +25997,7 @@
                   <a:srgbClr val="1B3B6F"/>
                 </a:solidFill>
                 <a:latin typeface="Amiri" pitchFamily="2" charset="-78"/>
+                <a:ea typeface="Amiri" pitchFamily="2" charset="-78"/>
                 <a:cs typeface="Amiri" pitchFamily="2" charset="-78"/>
               </a:rPr>
               <a:t>أَنَا الآنَ فِي ______ . الجَوُّ هُنَا ______ ، وَدَرَجَةُ الحَرَارَةِ ______ .</a:t>
@@ -26056,6 +26204,7 @@
                   <a:srgbClr val="1B3B6F"/>
                 </a:solidFill>
                 <a:latin typeface="Amiri" pitchFamily="2" charset="-78"/>
+                <a:ea typeface="Amiri" pitchFamily="2" charset="-78"/>
                 <a:cs typeface="Amiri" pitchFamily="2" charset="-78"/>
               </a:rPr>
               <a:t>أَمْسِ سَقَطَتْ ______ ، فَبَقِينَا ______ .</a:t>
@@ -26262,6 +26411,7 @@
                   <a:srgbClr val="1B3B6F"/>
                 </a:solidFill>
                 <a:latin typeface="Amiri" pitchFamily="2" charset="-78"/>
+                <a:ea typeface="Amiri" pitchFamily="2" charset="-78"/>
                 <a:cs typeface="Amiri" pitchFamily="2" charset="-78"/>
               </a:rPr>
               <a:t>أُحِبُّ هٰذَا الجَوَّ، لِأَنَّهُ أَدْفَأُ مِنْ ______ .</a:t>
@@ -26468,6 +26618,7 @@
                   <a:srgbClr val="1B3B6F"/>
                 </a:solidFill>
                 <a:latin typeface="Amiri" pitchFamily="2" charset="-78"/>
+                <a:ea typeface="Amiri" pitchFamily="2" charset="-78"/>
                 <a:cs typeface="Amiri" pitchFamily="2" charset="-78"/>
               </a:rPr>
               <a:t>حَسَبَ النَّشْرَةِ الجَوِّيَّةِ، سَتُشْرِقُ الشَّمْسُ غَدًا، وَسَنَزُورُ ______ .</a:t>
@@ -26674,6 +26825,7 @@
                   <a:srgbClr val="1B3B6F"/>
                 </a:solidFill>
                 <a:latin typeface="Amiri" pitchFamily="2" charset="-78"/>
+                <a:ea typeface="Amiri" pitchFamily="2" charset="-78"/>
                 <a:cs typeface="Amiri" pitchFamily="2" charset="-78"/>
               </a:rPr>
               <a:t>إِلَى اللِّقَاءِ، ______</a:t>
@@ -26913,13 +27065,9 @@
     <a:fontScheme name="Office">
       <a:majorFont>
         <a:latin typeface="Calibri Light" panose="020F0302020204030204"/>
-        <a:ea typeface=""/>
-        <a:cs typeface=""/>
-        <a:font script="Jpan" typeface="游ゴシック Light"/>
-        <a:font script="Hang" typeface="맑은 고딕"/>
-        <a:font script="Hans" typeface="等线 Light"/>
-        <a:font script="Hant" typeface="新細明體"/>
-        <a:font script="Arab" typeface="Times New Roman"/>
+        <a:ea typeface="Amiri" pitchFamily="2" charset="-78"/>
+        <a:cs typeface="Amiri" pitchFamily="2" charset="-78"/>
+        <a:font script="Arab" typeface="Amiri"/>
         <a:font script="Hebr" typeface="Times New Roman"/>
         <a:font script="Thai" typeface="Angsana New"/>
         <a:font script="Ethi" typeface="Nyala"/>
@@ -26965,13 +27113,9 @@
       </a:majorFont>
       <a:minorFont>
         <a:latin typeface="Calibri" panose="020F0502020204030204"/>
-        <a:ea typeface=""/>
-        <a:cs typeface=""/>
-        <a:font script="Jpan" typeface="游ゴシック"/>
-        <a:font script="Hang" typeface="맑은 고딕"/>
-        <a:font script="Hans" typeface="等线"/>
-        <a:font script="Hant" typeface="新細明體"/>
-        <a:font script="Arab" typeface="Arial"/>
+        <a:ea typeface="Amiri" pitchFamily="2" charset="-78"/>
+        <a:cs typeface="Amiri" pitchFamily="2" charset="-78"/>
+        <a:font script="Arab" typeface="Amiri"/>
         <a:font script="Hebr" typeface="Arial"/>
         <a:font script="Thai" typeface="Cordia New"/>
         <a:font script="Ethi" typeface="Nyala"/>

--- a/Topic_C/Exam_Practice/TC-L03_Writing_Workshop_Climate_Seasons_Weather.pptx
+++ b/Topic_C/Exam_Practice/TC-L03_Writing_Workshop_Climate_Seasons_Weather.pptx
@@ -3848,7 +3848,7 @@
                 <a:solidFill>
                   <a:srgbClr val="FFFFFF"/>
                 </a:solidFill>
-                <a:latin typeface="Calibri" pitchFamily="34" charset="0"/>
+                <a:latin typeface="Amiri" pitchFamily="2" charset="-78"/>
                 <a:ea typeface="Amiri" pitchFamily="2" charset="-78"/>
                 <a:cs typeface="Amiri" pitchFamily="2" charset="-78"/>
               </a:rPr>
@@ -3914,7 +3914,7 @@
                 <a:solidFill>
                   <a:srgbClr val="FFFFFF"/>
                 </a:solidFill>
-                <a:latin typeface="Calibri" pitchFamily="34" charset="0"/>
+                <a:latin typeface="Amiri" pitchFamily="2" charset="-78"/>
                 <a:ea typeface="Amiri" pitchFamily="2" charset="-78"/>
                 <a:cs typeface="Amiri" pitchFamily="2" charset="-78"/>
               </a:rPr>
@@ -3980,7 +3980,7 @@
                 <a:solidFill>
                   <a:srgbClr val="FFFFFF"/>
                 </a:solidFill>
-                <a:latin typeface="Calibri" pitchFamily="34" charset="0"/>
+                <a:latin typeface="Amiri" pitchFamily="2" charset="-78"/>
                 <a:ea typeface="Amiri" pitchFamily="2" charset="-78"/>
                 <a:cs typeface="Amiri" pitchFamily="2" charset="-78"/>
               </a:rPr>
@@ -4046,7 +4046,7 @@
                 <a:solidFill>
                   <a:srgbClr val="FFFFFF"/>
                 </a:solidFill>
-                <a:latin typeface="Calibri" pitchFamily="34" charset="0"/>
+                <a:latin typeface="Amiri" pitchFamily="2" charset="-78"/>
                 <a:ea typeface="Amiri" pitchFamily="2" charset="-78"/>
                 <a:cs typeface="Amiri" pitchFamily="2" charset="-78"/>
               </a:rPr>
@@ -4844,7 +4844,7 @@
                 <a:solidFill>
                   <a:srgbClr val="FFFFFF"/>
                 </a:solidFill>
-                <a:latin typeface="Calibri" pitchFamily="34" charset="0"/>
+                <a:latin typeface="Amiri" pitchFamily="2" charset="-78"/>
                 <a:ea typeface="Amiri" pitchFamily="2" charset="-78"/>
                 <a:cs typeface="Amiri" pitchFamily="2" charset="-78"/>
               </a:rPr>
@@ -4910,7 +4910,7 @@
                 <a:solidFill>
                   <a:srgbClr val="FFFFFF"/>
                 </a:solidFill>
-                <a:latin typeface="Calibri" pitchFamily="34" charset="0"/>
+                <a:latin typeface="Amiri" pitchFamily="2" charset="-78"/>
                 <a:ea typeface="Amiri" pitchFamily="2" charset="-78"/>
                 <a:cs typeface="Amiri" pitchFamily="2" charset="-78"/>
               </a:rPr>
@@ -4976,7 +4976,7 @@
                 <a:solidFill>
                   <a:srgbClr val="FFFFFF"/>
                 </a:solidFill>
-                <a:latin typeface="Calibri" pitchFamily="34" charset="0"/>
+                <a:latin typeface="Amiri" pitchFamily="2" charset="-78"/>
                 <a:ea typeface="Amiri" pitchFamily="2" charset="-78"/>
                 <a:cs typeface="Amiri" pitchFamily="2" charset="-78"/>
               </a:rPr>
@@ -5042,7 +5042,7 @@
                 <a:solidFill>
                   <a:srgbClr val="FFFFFF"/>
                 </a:solidFill>
-                <a:latin typeface="Calibri" pitchFamily="34" charset="0"/>
+                <a:latin typeface="Amiri" pitchFamily="2" charset="-78"/>
                 <a:ea typeface="Amiri" pitchFamily="2" charset="-78"/>
                 <a:cs typeface="Amiri" pitchFamily="2" charset="-78"/>
               </a:rPr>
@@ -8599,7 +8599,7 @@
                 <a:solidFill>
                   <a:srgbClr val="FFFFFF"/>
                 </a:solidFill>
-                <a:latin typeface="Calibri" pitchFamily="34" charset="0"/>
+                <a:latin typeface="Amiri" pitchFamily="2" charset="-78"/>
                 <a:ea typeface="Amiri" pitchFamily="2" charset="-78"/>
                 <a:cs typeface="Amiri" pitchFamily="2" charset="-78"/>
               </a:rPr>
@@ -8665,7 +8665,7 @@
                 <a:solidFill>
                   <a:srgbClr val="FFFFFF"/>
                 </a:solidFill>
-                <a:latin typeface="Calibri" pitchFamily="34" charset="0"/>
+                <a:latin typeface="Amiri" pitchFamily="2" charset="-78"/>
                 <a:ea typeface="Amiri" pitchFamily="2" charset="-78"/>
                 <a:cs typeface="Amiri" pitchFamily="2" charset="-78"/>
               </a:rPr>
@@ -8731,7 +8731,7 @@
                 <a:solidFill>
                   <a:srgbClr val="FFFFFF"/>
                 </a:solidFill>
-                <a:latin typeface="Calibri" pitchFamily="34" charset="0"/>
+                <a:latin typeface="Amiri" pitchFamily="2" charset="-78"/>
                 <a:ea typeface="Amiri" pitchFamily="2" charset="-78"/>
                 <a:cs typeface="Amiri" pitchFamily="2" charset="-78"/>
               </a:rPr>
@@ -8797,7 +8797,7 @@
                 <a:solidFill>
                   <a:srgbClr val="FFFFFF"/>
                 </a:solidFill>
-                <a:latin typeface="Calibri" pitchFamily="34" charset="0"/>
+                <a:latin typeface="Amiri" pitchFamily="2" charset="-78"/>
                 <a:ea typeface="Amiri" pitchFamily="2" charset="-78"/>
                 <a:cs typeface="Amiri" pitchFamily="2" charset="-78"/>
               </a:rPr>
@@ -9584,7 +9584,7 @@
                 <a:solidFill>
                   <a:srgbClr val="FFFFFF"/>
                 </a:solidFill>
-                <a:latin typeface="Calibri" pitchFamily="34" charset="0"/>
+                <a:latin typeface="Amiri" pitchFamily="2" charset="-78"/>
                 <a:ea typeface="Amiri" pitchFamily="2" charset="-78"/>
                 <a:cs typeface="Amiri" pitchFamily="2" charset="-78"/>
               </a:rPr>
@@ -9650,7 +9650,7 @@
                 <a:solidFill>
                   <a:srgbClr val="FFFFFF"/>
                 </a:solidFill>
-                <a:latin typeface="Calibri" pitchFamily="34" charset="0"/>
+                <a:latin typeface="Amiri" pitchFamily="2" charset="-78"/>
                 <a:ea typeface="Amiri" pitchFamily="2" charset="-78"/>
                 <a:cs typeface="Amiri" pitchFamily="2" charset="-78"/>
               </a:rPr>
@@ -9716,7 +9716,7 @@
                 <a:solidFill>
                   <a:srgbClr val="FFFFFF"/>
                 </a:solidFill>
-                <a:latin typeface="Calibri" pitchFamily="34" charset="0"/>
+                <a:latin typeface="Amiri" pitchFamily="2" charset="-78"/>
                 <a:ea typeface="Amiri" pitchFamily="2" charset="-78"/>
                 <a:cs typeface="Amiri" pitchFamily="2" charset="-78"/>
               </a:rPr>
@@ -9782,7 +9782,7 @@
                 <a:solidFill>
                   <a:srgbClr val="FFFFFF"/>
                 </a:solidFill>
-                <a:latin typeface="Calibri" pitchFamily="34" charset="0"/>
+                <a:latin typeface="Amiri" pitchFamily="2" charset="-78"/>
                 <a:ea typeface="Amiri" pitchFamily="2" charset="-78"/>
                 <a:cs typeface="Amiri" pitchFamily="2" charset="-78"/>
               </a:rPr>
@@ -10569,7 +10569,7 @@
                 <a:solidFill>
                   <a:srgbClr val="FFFFFF"/>
                 </a:solidFill>
-                <a:latin typeface="Calibri" pitchFamily="34" charset="0"/>
+                <a:latin typeface="Amiri" pitchFamily="2" charset="-78"/>
                 <a:ea typeface="Amiri" pitchFamily="2" charset="-78"/>
                 <a:cs typeface="Amiri" pitchFamily="2" charset="-78"/>
               </a:rPr>
@@ -10635,7 +10635,7 @@
                 <a:solidFill>
                   <a:srgbClr val="FFFFFF"/>
                 </a:solidFill>
-                <a:latin typeface="Calibri" pitchFamily="34" charset="0"/>
+                <a:latin typeface="Amiri" pitchFamily="2" charset="-78"/>
                 <a:ea typeface="Amiri" pitchFamily="2" charset="-78"/>
                 <a:cs typeface="Amiri" pitchFamily="2" charset="-78"/>
               </a:rPr>
@@ -10701,7 +10701,7 @@
                 <a:solidFill>
                   <a:srgbClr val="FFFFFF"/>
                 </a:solidFill>
-                <a:latin typeface="Calibri" pitchFamily="34" charset="0"/>
+                <a:latin typeface="Amiri" pitchFamily="2" charset="-78"/>
                 <a:ea typeface="Amiri" pitchFamily="2" charset="-78"/>
                 <a:cs typeface="Amiri" pitchFamily="2" charset="-78"/>
               </a:rPr>
@@ -10767,7 +10767,7 @@
                 <a:solidFill>
                   <a:srgbClr val="FFFFFF"/>
                 </a:solidFill>
-                <a:latin typeface="Calibri" pitchFamily="34" charset="0"/>
+                <a:latin typeface="Amiri" pitchFamily="2" charset="-78"/>
                 <a:ea typeface="Amiri" pitchFamily="2" charset="-78"/>
                 <a:cs typeface="Amiri" pitchFamily="2" charset="-78"/>
               </a:rPr>
